--- a/media/resources/files/amaldar_tartibi_ozun_tuz_v2.pptx
+++ b/media/resources/files/amaldar_tartibi_ozun_tuz_v2.pptx
@@ -11934,7 +11934,7 @@
                 </a:solidFill>
                 <a:latin typeface="Golos Text"/>
               </a:rPr>
-              <a:t>Баарыңызга ырахмат!</a:t>
+              <a:t>Баарыңызга рахмат!</a:t>
             </a:r>
           </a:p>
         </p:txBody>
